--- a/docs/BusinessPlan/BusinessPlan.pptx
+++ b/docs/BusinessPlan/BusinessPlan.pptx
@@ -323,7 +323,7 @@
           <a:p>
             <a:fld id="{5BCAD085-E8A6-8845-BD4E-CB4CCA059FC4}" type="datetimeFigureOut">
               <a:rPr lang="en-US" smtClean="0"/>
-              <a:t>5/21/2026</a:t>
+              <a:t>6/24/2026</a:t>
             </a:fld>
             <a:endParaRPr lang="en-US"/>
           </a:p>
@@ -491,7 +491,7 @@
           <a:p>
             <a:fld id="{5BCAD085-E8A6-8845-BD4E-CB4CCA059FC4}" type="datetimeFigureOut">
               <a:rPr lang="en-US" smtClean="0"/>
-              <a:t>5/21/2026</a:t>
+              <a:t>6/24/2026</a:t>
             </a:fld>
             <a:endParaRPr lang="en-US"/>
           </a:p>
@@ -669,7 +669,7 @@
           <a:p>
             <a:fld id="{5BCAD085-E8A6-8845-BD4E-CB4CCA059FC4}" type="datetimeFigureOut">
               <a:rPr lang="en-US" smtClean="0"/>
-              <a:t>5/21/2026</a:t>
+              <a:t>6/24/2026</a:t>
             </a:fld>
             <a:endParaRPr lang="en-US"/>
           </a:p>
@@ -837,7 +837,7 @@
           <a:p>
             <a:fld id="{5BCAD085-E8A6-8845-BD4E-CB4CCA059FC4}" type="datetimeFigureOut">
               <a:rPr lang="en-US" smtClean="0"/>
-              <a:t>5/21/2026</a:t>
+              <a:t>6/24/2026</a:t>
             </a:fld>
             <a:endParaRPr lang="en-US"/>
           </a:p>
@@ -1082,7 +1082,7 @@
           <a:p>
             <a:fld id="{5BCAD085-E8A6-8845-BD4E-CB4CCA059FC4}" type="datetimeFigureOut">
               <a:rPr lang="en-US" smtClean="0"/>
-              <a:t>5/21/2026</a:t>
+              <a:t>6/24/2026</a:t>
             </a:fld>
             <a:endParaRPr lang="en-US"/>
           </a:p>
@@ -1367,7 +1367,7 @@
           <a:p>
             <a:fld id="{5BCAD085-E8A6-8845-BD4E-CB4CCA059FC4}" type="datetimeFigureOut">
               <a:rPr lang="en-US" smtClean="0"/>
-              <a:t>5/21/2026</a:t>
+              <a:t>6/24/2026</a:t>
             </a:fld>
             <a:endParaRPr lang="en-US"/>
           </a:p>
@@ -1786,7 +1786,7 @@
           <a:p>
             <a:fld id="{5BCAD085-E8A6-8845-BD4E-CB4CCA059FC4}" type="datetimeFigureOut">
               <a:rPr lang="en-US" smtClean="0"/>
-              <a:t>5/21/2026</a:t>
+              <a:t>6/24/2026</a:t>
             </a:fld>
             <a:endParaRPr lang="en-US"/>
           </a:p>
@@ -1903,7 +1903,7 @@
           <a:p>
             <a:fld id="{5BCAD085-E8A6-8845-BD4E-CB4CCA059FC4}" type="datetimeFigureOut">
               <a:rPr lang="en-US" smtClean="0"/>
-              <a:t>5/21/2026</a:t>
+              <a:t>6/24/2026</a:t>
             </a:fld>
             <a:endParaRPr lang="en-US"/>
           </a:p>
@@ -1998,7 +1998,7 @@
           <a:p>
             <a:fld id="{5BCAD085-E8A6-8845-BD4E-CB4CCA059FC4}" type="datetimeFigureOut">
               <a:rPr lang="en-US" smtClean="0"/>
-              <a:t>5/21/2026</a:t>
+              <a:t>6/24/2026</a:t>
             </a:fld>
             <a:endParaRPr lang="en-US"/>
           </a:p>
@@ -2273,7 +2273,7 @@
           <a:p>
             <a:fld id="{5BCAD085-E8A6-8845-BD4E-CB4CCA059FC4}" type="datetimeFigureOut">
               <a:rPr lang="en-US" smtClean="0"/>
-              <a:t>5/21/2026</a:t>
+              <a:t>6/24/2026</a:t>
             </a:fld>
             <a:endParaRPr lang="en-US"/>
           </a:p>
@@ -2525,7 +2525,7 @@
           <a:p>
             <a:fld id="{5BCAD085-E8A6-8845-BD4E-CB4CCA059FC4}" type="datetimeFigureOut">
               <a:rPr lang="en-US" smtClean="0"/>
-              <a:t>5/21/2026</a:t>
+              <a:t>6/24/2026</a:t>
             </a:fld>
             <a:endParaRPr lang="en-US"/>
           </a:p>
@@ -2736,7 +2736,7 @@
           <a:p>
             <a:fld id="{5BCAD085-E8A6-8845-BD4E-CB4CCA059FC4}" type="datetimeFigureOut">
               <a:rPr lang="en-US" smtClean="0"/>
-              <a:t>5/21/2026</a:t>
+              <a:t>6/24/2026</a:t>
             </a:fld>
             <a:endParaRPr lang="en-US"/>
           </a:p>
@@ -21125,10 +21125,16 @@
           <p:cNvGraphicFramePr>
             <a:graphicFrameLocks noGrp="1"/>
           </p:cNvGraphicFramePr>
-          <p:nvPr/>
+          <p:nvPr>
+            <p:extLst>
+              <p:ext uri="{D42A27DB-BD31-4B8C-83A1-F6EECF244321}">
+                <p14:modId xmlns:p14="http://schemas.microsoft.com/office/powerpoint/2010/main" val="1982659088"/>
+              </p:ext>
+            </p:extLst>
+          </p:nvPr>
         </p:nvGraphicFramePr>
         <p:xfrm>
-          <a:off x="457200" y="1691640"/>
+          <a:off x="429768" y="2057400"/>
           <a:ext cx="11247120" cy="4114800"/>
         </p:xfrm>
         <a:graphic>
@@ -22036,7 +22042,7 @@
                     <a:p>
                       <a:pPr algn="l"/>
                       <a:r>
-                        <a:rPr sz="1000">
+                        <a:rPr sz="1000" dirty="0">
                           <a:solidFill>
                             <a:srgbClr val="E6ECF5"/>
                           </a:solidFill>
